--- a/slides/decks/s22-all.pptx
+++ b/slides/decks/s22-all.pptx
@@ -134,20 +134,20 @@
   <p:extLst>
     <p:ext uri="{521415D9-36F7-43E2-AB2F-B90AF26B5E84}">
       <p14:sectionLst xmlns:p14="http://schemas.microsoft.com/office/powerpoint/2010/main">
-        <p14:section name="Opening" id="{f7aead26-aaa4-54c3-7955-df32ed404808}">
+        <p14:section name="Opening" id="{45fd7b9c-b2ef-64d2-1290-02aa50e94e13}">
           <p14:sldIdLst>
             <p14:sldId id="256"/>
             <p14:sldId id="257"/>
           </p14:sldIdLst>
         </p14:section>
-        <p14:section name="Risk and the CR1 decision" id="{348e42d3-2f62-fcda-fb8d-bd545b7dbb16}">
+        <p14:section name="Risk and the CR1 decision" id="{37579528-6185-1d8c-f839-ca22c5258fb1}">
           <p14:sldIdLst>
             <p14:sldId id="258"/>
             <p14:sldId id="259"/>
             <p14:sldId id="260"/>
           </p14:sldIdLst>
         </p14:section>
-        <p14:section name="First-line, salvage and CAR-T" id="{a256d7c5-1d0c-95e5-68fb-2928946355be}">
+        <p14:section name="First-line, salvage and CAR-T" id="{d86cfa4c-61a6-0049-f2c6-c1d7c42a2e0a}">
           <p14:sldIdLst>
             <p14:sldId id="261"/>
             <p14:sldId id="262"/>
@@ -156,7 +156,7 @@
             <p14:sldId id="265"/>
           </p14:sldIdLst>
         </p14:section>
-        <p14:section name="Transplant technique and outcome" id="{8da69077-5cf4-79bc-5404-4e1f0f2ee9c2}">
+        <p14:section name="Transplant technique and outcome" id="{53592094-4f21-9262-f175-0c313d41f9c4}">
           <p14:sldIdLst>
             <p14:sldId id="266"/>
             <p14:sldId id="267"/>
@@ -165,7 +165,7 @@
             <p14:sldId id="270"/>
           </p14:sldIdLst>
         </p14:section>
-        <p14:section name="Children and questions" id="{2fccb106-16fa-65f1-b2f6-8bc8ae09b2a6}">
+        <p14:section name="Children and questions" id="{ba8da18e-e519-4316-5f4d-5137860aa61d}">
           <p14:sldIdLst>
             <p14:sldId id="271"/>
             <p14:sldId id="272"/>
@@ -176,14 +176,14 @@
             <p14:sldId id="277"/>
           </p14:sldIdLst>
         </p14:section>
-        <p14:section name="References" id="{8b68a74d-85ca-9c29-17e2-5e6cf7476424}">
+        <p14:section name="References" id="{b3449cae-62e0-5025-781e-bbc45ab4fb02}">
           <p14:sldIdLst>
             <p14:sldId id="278"/>
             <p14:sldId id="279"/>
             <p14:sldId id="280"/>
           </p14:sldIdLst>
         </p14:section>
-        <p14:section name="Backup" id="{58c47811-5fb7-7f69-67e5-d66378c530f6}">
+        <p14:section name="Backup" id="{e04ca972-1e66-a4c8-7623-d0a93a8f5135}">
           <p14:sldIdLst>
             <p14:sldId id="281"/>
             <p14:sldId id="282"/>
@@ -610,7 +610,7 @@
             </a:pPr>
             <a:r>
               <a:rPr lang="en-US" dirty="0"/>
-              <a:t>各位好，第 22 堂講 ALL 的造血幹細胞移植，主軸是 EBMT Handbook 第 72 章成人 ALL，再從第 73 章兒童 ALL 挑出和成人對照的考點。今天的順序是風險分層和 CR1 的移植適應症，接著是第一線、salvage 和 CAR-T，然後是 conditioning、donor 和移植後 TKI，最後三題 board-style 題目。</a:t>
+              <a:t>各位好，第 22 堂講 ALL 的造血幹細胞移植，主軸是 EBMT Handbook 第 72 章成人 ALL，再從第 73 章兒童 ALL 挑出和成人對照的考點。今天的順序是風險分層和 CR1 的移植適應症，接著是第一線、salvage 和 CAR-T，然後是 conditioning、donor 和移植後 TKI，最後三題 board-style 題目。今天會反覆回到 MRD。</a:t>
             </a:r>
           </a:p>
         </p:txBody>
@@ -738,6 +738,39 @@
               <a:t>T-ALL 的 anti-CD7、anti-CD5 CAR-T 還在試驗中，早期結果不錯，有反應一樣要移植。CRS 和 ICANS 的分級和處理，請看第 20 堂。</a:t>
             </a:r>
           </a:p>
+          <a:p>
+            <a:pPr>
+              <a:spcAft>
+                <a:spcPts val="600"/>
+              </a:spcAft>
+            </a:pPr>
+            <a:r>
+              <a:rPr lang="en-US" dirty="0"/>
+              <a:t>要注意第 72 章寫的是歐洲的核准條件，其他地區的適應症要另外確認。CAR-T 和移植的先後順序也要看病人狀況，已經做過 allo-HCT 才復發的病人，CAR-T 本身就是主要的治療，書上建議的鞏固性移植，指的是之前沒移植過的人。考試若給一個 CAR-T 後 CR、從未移植、有 donor 的年輕病人，依第 72 章，應考慮 allo-HCT。</a:t>
+            </a:r>
+          </a:p>
+          <a:p>
+            <a:pPr>
+              <a:spcAft>
+                <a:spcPts val="600"/>
+              </a:spcAft>
+            </a:pPr>
+            <a:r>
+              <a:rPr lang="en-US" b="1" dirty="0"/>
+              <a:t>講者提醒（不念出來）：</a:t>
+            </a:r>
+          </a:p>
+          <a:p>
+            <a:pPr>
+              <a:spcAft>
+                <a:spcPts val="600"/>
+              </a:spcAft>
+            </a:pPr>
+            <a:r>
+              <a:rPr lang="en-US" dirty="0"/>
+              <a:t>- TO CONFIRM BEFORE PRESENTING: CAR-T age limits on the slide are the European labels quoted in Ch. 72 (tisagenlecleucel up to 25 y; brexucabtagene autoleucel ≥ 26 y). Check current US/Taiwan labels and NHI reimbursement if asked.</a:t>
+            </a:r>
+          </a:p>
         </p:txBody>
       </p:sp>
       <p:sp>
@@ -852,6 +885,28 @@
               <a:t>Auto-HCT 在成人 ALL 不是標準治療，只留給 MRD 陰性又不適合 allo 的病人，conditioning 用分次 TBI，例如 6 × 2 Gy，加 CY 或 VP。</a:t>
             </a:r>
           </a:p>
+          <a:p>
+            <a:pPr>
+              <a:spcAft>
+                <a:spcPts val="600"/>
+              </a:spcAft>
+            </a:pPr>
+            <a:r>
+              <a:rPr lang="en-US" dirty="0"/>
+              <a:t>Refractory 病人的移植資料來自 Pavlu 2017 的 EBMT 分析，有一部分病人仍可長期存活，所以不是絕對禁忌。Auto-HCT 的證據則多半是回溯性的，細節放在 backup。</a:t>
+            </a:r>
+          </a:p>
+          <a:p>
+            <a:pPr>
+              <a:spcAft>
+                <a:spcPts val="600"/>
+              </a:spcAft>
+            </a:pPr>
+            <a:r>
+              <a:rPr lang="en-US" dirty="0"/>
+              <a:t>CR2 是標準適應症這一點要記熟。</a:t>
+            </a:r>
+          </a:p>
         </p:txBody>
       </p:sp>
       <p:sp>
@@ -977,6 +1032,28 @@
               <a:t>CR1 之後才移植的病人，緩解中死亡率可以超過 30%。如果病人是用新的抗體藥達到 MRD 陰性的後續緩解，作者建議討論減量 conditioning。用過 inotuzumab 的病人，要避開容易引發 SOS/VOD 的方案，例如 double alkylator。考試最常問的就是 45 歲和 12 到 13 Gy 這兩個數字。</a:t>
             </a:r>
           </a:p>
+          <a:p>
+            <a:pPr>
+              <a:spcAft>
+                <a:spcPts val="600"/>
+              </a:spcAft>
+            </a:pPr>
+            <a:r>
+              <a:rPr lang="en-US" dirty="0"/>
+              <a:t>Key Points 列出的 MAC 組合還有 TBI/CY/VEP 三合一。年齡的分界在 Key Points 寫成小於 45 歲用 MAC、大於 44 歲用減量，意思相同。</a:t>
+            </a:r>
+          </a:p>
+          <a:p>
+            <a:pPr>
+              <a:spcAft>
+                <a:spcPts val="600"/>
+              </a:spcAft>
+            </a:pPr>
+            <a:r>
+              <a:rPr lang="en-US" dirty="0"/>
+              <a:t>整理一下，年輕、體能好用 12 到 13 Gy TBI；年紀大或不適合 MAC 用 FLU 為主的減量方案；用過 inotuzumab 的避開 SOS 風險高的方案；後續緩解又 MRD 陰性的，可以考慮減量。</a:t>
+            </a:r>
+          </a:p>
         </p:txBody>
       </p:sp>
       <p:sp>
@@ -1102,6 +1179,17 @@
               <a:t>GVHD prophylaxis 標準是 CSA 加 MTX，或 CSA 加 MMF。所有 unrelated donor 都應考慮加 ATG，雖然 registry 資料顯示 ATG 在 Ph-negative 和 Ph-positive 都和較高的復發有關。Haplo 用 PTCy 取代 ATG，MUD 和 MMUD 也可以用 PTCy。</a:t>
             </a:r>
           </a:p>
+          <a:p>
+            <a:pPr>
+              <a:spcAft>
+                <a:spcPts val="600"/>
+              </a:spcAft>
+            </a:pPr>
+            <a:r>
+              <a:rPr lang="en-US" dirty="0"/>
+              <a:t>ATG 的這個取捨考試很常考。ATG 可以減少 GVHD，但 ALL 的 GVL 效應很重要，壓得太強就可能增加復發，所以書上的寫法是應該考慮，而不是一律使用。Key Points 也把 ATG 列在 MSD，這和正文只寫 unrelated donor 不太一致，講者建議依各中心經驗決定。</a:t>
+            </a:r>
+          </a:p>
         </p:txBody>
       </p:sp>
       <p:sp>
@@ -1227,6 +1315,28 @@
               <a:t>Ph-negative 的 B-ALL 移植後如果 MRD 轉陽，第 72 章提到可以用抗體、ADC 或 CAR-T 做 pre-emptive 治療，但應該在前瞻性試驗中評估。DLI 和移植後 MRD 監測的細節，在第 19 堂。</a:t>
             </a:r>
           </a:p>
+          <a:p>
+            <a:pPr>
+              <a:spcAft>
+                <a:spcPts val="600"/>
+              </a:spcAft>
+            </a:pPr>
+            <a:r>
+              <a:rPr lang="en-US" dirty="0"/>
+              <a:t>為什麼 Ph-positive 要特別處理，因為移植後復發的病人，BCR::ABL1 是一個現成而且敏感的 MRD 標記，又有藥可以直接打。挑 TKI 時，如果移植前已經測到抗藥性 mutation，就要換成能涵蓋那個 mutation 的藥。</a:t>
+            </a:r>
+          </a:p>
+          <a:p>
+            <a:pPr>
+              <a:spcAft>
+                <a:spcPts val="600"/>
+              </a:spcAft>
+            </a:pPr>
+            <a:r>
+              <a:rPr lang="en-US" dirty="0"/>
+              <a:t>Ph-positive 的處理大概是今天和 AML 最不一樣的地方，AML 的部分在第 21 堂。</a:t>
+            </a:r>
+          </a:p>
         </p:txBody>
       </p:sp>
       <p:sp>
@@ -1352,6 +1462,17 @@
               <a:t>看這張表要注意時間點不一樣，有兩年也有三年。年輕成人 MUD 的復發率 14 到 21%，比 MSD 的 23 到 32% 低，書上沒有解釋原因。CR2 這一行，講者的簡化說法是 TRM、復發、存活大約各佔三分之一，跟病人解釋預後時很好用。</a:t>
             </a:r>
           </a:p>
+          <a:p>
+            <a:pPr>
+              <a:spcAft>
+                <a:spcPts val="600"/>
+              </a:spcAft>
+            </a:pPr>
+            <a:r>
+              <a:rPr lang="en-US" dirty="0"/>
+              <a:t>這些數字可以用來回答一個常見的臨床問題，60 歲以上的 ALL 值不值得移植。三年 OS 四成上下，對照不移植時超過 60 歲長期存活不到兩成，講者的看法是移植仍然有意義，但要接受大約四分之一的 TRM。</a:t>
+            </a:r>
+          </a:p>
         </p:txBody>
       </p:sp>
       <p:sp>
@@ -1477,6 +1598,28 @@
               <a:t>兒童 MSD 移植因為植入快、免疫重建快、感染少，仍然優先；MSD 骨髓移植可以只用 cyclosporine，保留 GVL。另外兩點也常考，未達形態學緩解的兒童不應移植，最後一次化療到 conditioning 最好間隔 3 到 6 週。</a:t>
             </a:r>
           </a:p>
+          <a:p>
+            <a:pPr>
+              <a:spcAft>
+                <a:spcPts val="600"/>
+              </a:spcAft>
+            </a:pPr>
+            <a:r>
+              <a:rPr lang="en-US" dirty="0"/>
+              <a:t>兒童和成人最大的差別在於兒童化療本身效果很好，所以移植的門檻高得多；成人化療效果差，CR1 移植的範圍就比較寬。Conditioning 的 TBI 則是兩邊一致，兒童和年輕成人都以 TBI 為優先。</a:t>
+            </a:r>
+          </a:p>
+          <a:p>
+            <a:pPr>
+              <a:spcAft>
+                <a:spcPts val="600"/>
+              </a:spcAft>
+            </a:pPr>
+            <a:r>
+              <a:rPr lang="en-US" dirty="0"/>
+              <a:t>成人病人若是 AYA，可以參考兒童的做法。</a:t>
+            </a:r>
+          </a:p>
         </p:txBody>
       </p:sp>
       <p:sp>
@@ -1598,6 +1741,28 @@
               </a:spcAft>
             </a:pPr>
             <a:r>
+              <a:rPr lang="en-US" dirty="0"/>
+              <a:t>這題考的是 MRD 的兩個門檻用在哪一個時間點。</a:t>
+            </a:r>
+          </a:p>
+          <a:p>
+            <a:pPr>
+              <a:spcAft>
+                <a:spcPts val="600"/>
+              </a:spcAft>
+            </a:pPr>
+            <a:r>
+              <a:rPr lang="en-US" dirty="0"/>
+              <a:t>題目裡有兩個 MRD 數字，要分清楚各是哪個時間點。</a:t>
+            </a:r>
+          </a:p>
+          <a:p>
+            <a:pPr>
+              <a:spcAft>
+                <a:spcPts val="600"/>
+              </a:spcAft>
+            </a:pPr>
+            <a:r>
               <a:rPr lang="en-US" b="1" dirty="0"/>
               <a:t>[Pause for answers.]</a:t>
             </a:r>
@@ -1716,6 +1881,28 @@
               <a:t>最容易選錯的是 E。10⁻³ 是 induction 之後的門檻，consolidation 之後要用 10⁻⁴；而 MRD 從持續陽性再升到 10⁻³，已經是非常高的復發風險，不該等。A 忽略了 MRD，B 的 auto-HCT 只給 MRD 陰性又不能做 allo 的人，D 的 nelarabine 是 T-ALL 的藥，而且在成人第一線也沒有好處。</a:t>
             </a:r>
           </a:p>
+          <a:p>
+            <a:pPr>
+              <a:spcAft>
+                <a:spcPts val="600"/>
+              </a:spcAft>
+            </a:pPr>
+            <a:r>
+              <a:rPr lang="en-US" dirty="0"/>
+              <a:t>他的初診白血球和 induction 後 MRD 都不算高風險，所以只看初診資料會以為可以只做化療，這正是題目設計的陷阱。</a:t>
+            </a:r>
+          </a:p>
+          <a:p>
+            <a:pPr>
+              <a:spcAft>
+                <a:spcPts val="600"/>
+              </a:spcAft>
+            </a:pPr>
+            <a:r>
+              <a:rPr lang="en-US" dirty="0"/>
+              <a:t>這題對應今天 MRD 的那張流程圖。</a:t>
+            </a:r>
+          </a:p>
         </p:txBody>
       </p:sp>
       <p:sp>
@@ -1837,6 +2024,39 @@
               </a:spcAft>
             </a:pPr>
             <a:r>
+              <a:rPr lang="en-US" dirty="0"/>
+              <a:t>這題同時考年齡、conditioning 強度和移植後的處置，選項要整句看完。</a:t>
+            </a:r>
+          </a:p>
+          <a:p>
+            <a:pPr>
+              <a:spcAft>
+                <a:spcPts val="600"/>
+              </a:spcAft>
+            </a:pPr>
+            <a:r>
+              <a:rPr lang="en-US" dirty="0"/>
+              <a:t>注意她的年齡。</a:t>
+            </a:r>
+          </a:p>
+          <a:p>
+            <a:pPr>
+              <a:spcAft>
+                <a:spcPts val="600"/>
+              </a:spcAft>
+            </a:pPr>
+            <a:r>
+              <a:rPr lang="en-US" dirty="0"/>
+              <a:t>她已經在 molecular CR，這一點會影響大家對 auto 的判斷。</a:t>
+            </a:r>
+          </a:p>
+          <a:p>
+            <a:pPr>
+              <a:spcAft>
+                <a:spcPts val="600"/>
+              </a:spcAft>
+            </a:pPr>
+            <a:r>
               <a:rPr lang="en-US" b="1" dirty="0"/>
               <a:t>[Pause for answers.]</a:t>
             </a:r>
@@ -1955,6 +2175,17 @@
               <a:t>第三段回到移植本身，conditioning 以 45 歲為界，donor 的選擇、GVHD prophylaxis，以及 Ph-positive 移植後的 TKI，最後看各族群的 TRM、復發和存活數字。第四段用一張表對照兒童 ALL 和成人的不同，然後三題 board-style 題目。CAR-T 的 CRS 和 neurotoxicity 是第 20 堂的內容，今天只講 CAR-T 在 ALL 的適應症和之後要不要移植。</a:t>
             </a:r>
           </a:p>
+          <a:p>
+            <a:pPr>
+              <a:spcAft>
+                <a:spcPts val="600"/>
+              </a:spcAft>
+            </a:pPr>
+            <a:r>
+              <a:rPr lang="en-US" dirty="0"/>
+              <a:t>每一段都對應最後的一題題目，大家可以邊聽邊想題目會怎麼出。</a:t>
+            </a:r>
+          </a:p>
         </p:txBody>
       </p:sp>
       <p:sp>
@@ -2069,6 +2300,39 @@
               <a:t>A 的劑量適合 45 歲以下，而且漏了 TKI。C 等到血液學復發才給 TKI 太晚，書上的 pre-emptive 指的是 MRD 層次。D 是主要干擾，回溯資料顯示 molecular CR 的 Ph-positive 做 auto 和 allo 存活相近，但 auto 在成人 ALL 仍不是標準。</a:t>
             </a:r>
           </a:p>
+          <a:p>
+            <a:pPr>
+              <a:spcAft>
+                <a:spcPts val="600"/>
+              </a:spcAft>
+            </a:pPr>
+            <a:r>
+              <a:rPr lang="en-US" dirty="0"/>
+              <a:t>E 不移植只適合不能移植的老年病人，她 52 歲、有 donor、沒有 comorbidity，應該移植。</a:t>
+            </a:r>
+          </a:p>
+          <a:p>
+            <a:pPr>
+              <a:spcAft>
+                <a:spcPts val="600"/>
+              </a:spcAft>
+            </a:pPr>
+            <a:r>
+              <a:rPr lang="en-US" dirty="0"/>
+              <a:t>C 的另一個問題是 BU/CY MAC 對 52 歲來說強度太高。</a:t>
+            </a:r>
+          </a:p>
+          <a:p>
+            <a:pPr>
+              <a:spcAft>
+                <a:spcPts val="600"/>
+              </a:spcAft>
+            </a:pPr>
+            <a:r>
+              <a:rPr lang="en-US" dirty="0"/>
+              <a:t>這題對應 conditioning 和 TKI 兩張表。</a:t>
+            </a:r>
+          </a:p>
         </p:txBody>
       </p:sp>
       <p:sp>
@@ -2190,6 +2454,39 @@
               </a:spcAft>
             </a:pPr>
             <a:r>
+              <a:rPr lang="en-US" dirty="0"/>
+              <a:t>這題同時考適應症、時機和 conditioning。</a:t>
+            </a:r>
+          </a:p>
+          <a:p>
+            <a:pPr>
+              <a:spcAft>
+                <a:spcPts val="600"/>
+              </a:spcAft>
+            </a:pPr>
+            <a:r>
+              <a:rPr lang="en-US" dirty="0"/>
+              <a:t>注意 inotuzumab 已經用了兩個 cycle。</a:t>
+            </a:r>
+          </a:p>
+          <a:p>
+            <a:pPr>
+              <a:spcAft>
+                <a:spcPts val="600"/>
+              </a:spcAft>
+            </a:pPr>
+            <a:r>
+              <a:rPr lang="en-US" dirty="0"/>
+              <a:t>肝功能正常這個條件也要納入考慮。</a:t>
+            </a:r>
+          </a:p>
+          <a:p>
+            <a:pPr>
+              <a:spcAft>
+                <a:spcPts val="600"/>
+              </a:spcAft>
+            </a:pPr>
+            <a:r>
               <a:rPr lang="en-US" b="1" dirty="0"/>
               <a:t>[Pause for answers.]</a:t>
             </a:r>
@@ -2308,6 +2605,39 @@
               <a:t>B 是主要的干擾選項。Auto-HCT 在成人 ALL 不是標準，她年輕又有 donor，應該做 allo。像她這樣用抗體藥拿到 MRD 陰性的病人，書上也建議討論 dose-reduced conditioning。</a:t>
             </a:r>
           </a:p>
+          <a:p>
+            <a:pPr>
+              <a:spcAft>
+                <a:spcPts val="600"/>
+              </a:spcAft>
+            </a:pPr>
+            <a:r>
+              <a:rPr lang="en-US" dirty="0"/>
+              <a:t>她還年輕、肝功能正常，所以在避開 SOS 風險高的方案之下，仍可依年齡選擇 conditioning 強度。</a:t>
+            </a:r>
+          </a:p>
+          <a:p>
+            <a:pPr>
+              <a:spcAft>
+                <a:spcPts val="600"/>
+              </a:spcAft>
+            </a:pPr>
+            <a:r>
+              <a:rPr lang="en-US" dirty="0"/>
+              <a:t>移植前也要再確認肝功能和是否有 VOD 的早期徵象。</a:t>
+            </a:r>
+          </a:p>
+          <a:p>
+            <a:pPr>
+              <a:spcAft>
+                <a:spcPts val="600"/>
+              </a:spcAft>
+            </a:pPr>
+            <a:r>
+              <a:rPr lang="en-US" dirty="0"/>
+              <a:t>這題對應 inotuzumab 的那張流程圖。</a:t>
+            </a:r>
+          </a:p>
         </p:txBody>
       </p:sp>
       <p:sp>
@@ -2961,6 +3291,17 @@
               <a:t>遺傳學上，成人最常見的不良異常是 KMT2A rearrangement。Low hypodiploidy 和五個以上異常的 complex karyotype，各 study group 的看法不一致。Ph-positive 佔成人 ALL 的 20 到 30%，年紀越大比例越高；以前算 very high risk，TKI 時代之後和 Ph-negative 的結果已經差不多。Ph-like ALL 預後不好，但很多國家沒有常規檢測。</a:t>
             </a:r>
           </a:p>
+          <a:p>
+            <a:pPr>
+              <a:spcAft>
+                <a:spcPts val="600"/>
+              </a:spcAft>
+            </a:pPr>
+            <a:r>
+              <a:rPr lang="en-US" dirty="0"/>
+              <a:t>這張表的用途是在初診時就把病人分出風險高低。風險高的病人，induction 一開始就應該送 HLA typing，找好 donor，等緩解之後才不會耽誤移植時機。後面會看到，這些初診特徵只是第一層篩選，真正的決定還要看 MRD。</a:t>
+            </a:r>
+          </a:p>
         </p:txBody>
       </p:sp>
       <p:sp>
@@ -3075,6 +3416,17 @@
               <a:t>測法有兩種。Flow cytometry 看 aberrant phenotype；RQ-PCR 測 BCR::ABL1 這類 fusion transcript，或病人特有的 Ig、TCR rearrangement。NGS 和 digital PCR 更敏感，但還沒標準化。</a:t>
             </a:r>
           </a:p>
+          <a:p>
+            <a:pPr>
+              <a:spcAft>
+                <a:spcPts val="600"/>
+              </a:spcAft>
+            </a:pPr>
+            <a:r>
+              <a:rPr lang="en-US" dirty="0"/>
+              <a:t>實務上，MRD 的追蹤要從 induction 結束一路做到 consolidation 之後，而且最好用同一種方法、同一個實驗室，數值才能前後比較。這兩個門檻相差十倍，題目常把時間點和數字錯配，選項看到 consolidation 後用 10⁻³ 的，就要小心。</a:t>
+            </a:r>
+          </a:p>
         </p:txBody>
       </p:sp>
       <p:sp>
@@ -3211,6 +3563,28 @@
               <a:t>Key Points 的註腳把最重要的歸納成三個，經過兩個以上療程 MRD 仍持續、初診白血球高、高風險 cytogenetics。病房實務上，初診時的特徵只是預先排 HLA typing 的理由，真正決定要不要移植的，通常是 consolidation 之後的 MRD。題目若給一個初診特徵普通、但 consolidation 後 MRD 還是陽性的病人，答案就是移植。</a:t>
             </a:r>
           </a:p>
+          <a:p>
+            <a:pPr>
+              <a:spcAft>
+                <a:spcPts val="600"/>
+              </a:spcAft>
+            </a:pPr>
+            <a:r>
+              <a:rPr lang="en-US" dirty="0"/>
+              <a:t>為什麼這麼強調 MRD，因為它同時反映了疾病生物學和治療反應，比任何單一的初診特徵都更能預測復發。</a:t>
+            </a:r>
+          </a:p>
+          <a:p>
+            <a:pPr>
+              <a:spcAft>
+                <a:spcPts val="600"/>
+              </a:spcAft>
+            </a:pPr>
+            <a:r>
+              <a:rPr lang="en-US" dirty="0"/>
+              <a:t>這三層的分法也提醒我們，看到不同國家的 protocol 對 high risk 定義不同，是正常的，不代表誰錯，只是證據強度不一樣。</a:t>
+            </a:r>
+          </a:p>
         </p:txBody>
       </p:sp>
       <p:sp>
@@ -3336,6 +3710,28 @@
               <a:t>右邊是 Ph-positive，整條路沒有分岔。Imatinib 加或不加低劑量化療做 induction，consolidation 也是 imatinib 加化療，然後所有人走 allo-HCT，移植後接 TKI maintenance，可以 prophylactic，也可以由 MRD 決定。圖說也提到 MRD 陰性病人用 blinatumomab 做 consolidation，可能很快會成為選項。</a:t>
             </a:r>
           </a:p>
+          <a:p>
+            <a:pPr>
+              <a:spcAft>
+                <a:spcPts val="600"/>
+              </a:spcAft>
+            </a:pPr>
+            <a:r>
+              <a:rPr lang="en-US" dirty="0"/>
+              <a:t>這張圖值得記住的是兩邊的不對稱。Ph-negative 要靠風險和 MRD 才決定誰移植，Ph-positive 則是預設每個人都移植。考題問 Ph-positive CR1 要不要移植，依這張圖，答案是要考慮。至於 MRD 陰性但 high risk 的 Ph-negative 病人，依圖仍然走 allo-HCT。</a:t>
+            </a:r>
+          </a:p>
+          <a:p>
+            <a:pPr>
+              <a:spcAft>
+                <a:spcPts val="600"/>
+              </a:spcAft>
+            </a:pPr>
+            <a:r>
+              <a:rPr lang="en-US" dirty="0"/>
+              <a:t>流程圖的圖說也寫到，MRD 陰性病人的 blinatumomab consolidation 未來可能加入。</a:t>
+            </a:r>
+          </a:p>
         </p:txBody>
       </p:sp>
       <p:sp>
@@ -3457,6 +3853,17 @@
               </a:spcAft>
             </a:pPr>
             <a:r>
+              <a:rPr lang="en-US" dirty="0"/>
+              <a:t>兩邊的 CNS prophylaxis 都很重要，Ph-negative 在整個療程中間歇給予，Ph-positive 在 consolidation 也用 high-dose MTX 搭配 imatinib。病房上看到 Ph-positive 的老年病人不適合移植，書上也提到 BCR::ABL1 反而可能是相對有利的因子，因為對 TKI 敏感。</a:t>
+            </a:r>
+          </a:p>
+          <a:p>
+            <a:pPr>
+              <a:spcAft>
+                <a:spcPts val="600"/>
+              </a:spcAft>
+            </a:pPr>
+            <a:r>
               <a:rPr lang="en-US" b="1" dirty="0"/>
               <a:t>講者提醒（不念出來）：</a:t>
             </a:r>
@@ -3597,6 +4004,28 @@
               <a:t>T-ALL 復發的選擇少很多。FLAG 加減 idarubicin 反應率只有 30 到 40%，有反應的人 median OS 也只有六個月。Nelarabine 單用或合併化療是合理的替代。Bortezomib 為基礎的方案和 daratumumab，則用在沒有其他選擇的病人，資料多半是小型系列。不論哪一種，只要有反應，就應該接 allo-HCT 鞏固。</a:t>
             </a:r>
           </a:p>
+          <a:p>
+            <a:pPr>
+              <a:spcAft>
+                <a:spcPts val="600"/>
+              </a:spcAft>
+            </a:pPr>
+            <a:r>
+              <a:rPr lang="en-US" dirty="0"/>
+              <a:t>這張表的數字有一個用法。跟病人解釋為什麼要在第一次緩解就移植，可以用第二次 salvage 只有兩成左右的 CR 來說明，一旦復發，再次拿到緩解的機會就大幅下降。新藥雖然把 CR 拉高，但沒有移植的話，長期治癒仍然有限，所以每一個選項的終點都是移植。考題常問 inotuzumab 和 blinatumomab 哪一個 CR rate 比較高，答案是 inotuzumab 的 80%。</a:t>
+            </a:r>
+          </a:p>
+          <a:p>
+            <a:pPr>
+              <a:spcAft>
+                <a:spcPts val="600"/>
+              </a:spcAft>
+            </a:pPr>
+            <a:r>
+              <a:rPr lang="en-US" dirty="0"/>
+              <a:t>兩個抗體的毒性也不一樣，inotuzumab 要注意肝和 VOD。</a:t>
+            </a:r>
+          </a:p>
         </p:txBody>
       </p:sp>
       <p:sp>
@@ -3709,6 +4138,28 @@
             <a:r>
               <a:rPr lang="en-US" dirty="0"/>
               <a:t>所以第 72 章建議 allo-HCT 最好在開始 salvage 之後 6 到 8 週內完成，conditioning 也要避開容易造成 SOS/VOD 的組合。實務上，開始 inotuzumab 的同一週就要啟動找 donor。SOS/VOD 的診斷和治療在第 13 堂。</a:t>
+            </a:r>
+          </a:p>
+          <a:p>
+            <a:pPr>
+              <a:spcAft>
+                <a:spcPts val="600"/>
+              </a:spcAft>
+            </a:pPr>
+            <a:r>
+              <a:rPr lang="en-US" dirty="0"/>
+              <a:t>這張圖的重點是時間。書上沒有給一個絕對的療程數上限，但兩個療程是風險上升的分界，所以臨床上傾向在兩個療程內拿到緩解，就盡快進移植。如果肝功能本來就不好，更要縮短 inotuzumab 的暴露。</a:t>
+            </a:r>
+          </a:p>
+          <a:p>
+            <a:pPr>
+              <a:spcAft>
+                <a:spcPts val="600"/>
+              </a:spcAft>
+            </a:pPr>
+            <a:r>
+              <a:rPr lang="en-US" dirty="0"/>
+              <a:t>這也是第三題的情境。</a:t>
             </a:r>
           </a:p>
         </p:txBody>

--- a/slides/decks/s22-all.pptx
+++ b/slides/decks/s22-all.pptx
@@ -134,20 +134,20 @@
   <p:extLst>
     <p:ext uri="{521415D9-36F7-43E2-AB2F-B90AF26B5E84}">
       <p14:sectionLst xmlns:p14="http://schemas.microsoft.com/office/powerpoint/2010/main">
-        <p14:section name="Opening" id="{45fd7b9c-b2ef-64d2-1290-02aa50e94e13}">
+        <p14:section name="Opening" id="{777103c9-53b5-fc68-59e9-ed51a326c0ae}">
           <p14:sldIdLst>
             <p14:sldId id="256"/>
             <p14:sldId id="257"/>
           </p14:sldIdLst>
         </p14:section>
-        <p14:section name="Risk and the CR1 decision" id="{37579528-6185-1d8c-f839-ca22c5258fb1}">
+        <p14:section name="Risk and the CR1 decision" id="{efab703b-b476-0e4a-d505-009e0af23f3c}">
           <p14:sldIdLst>
             <p14:sldId id="258"/>
             <p14:sldId id="259"/>
             <p14:sldId id="260"/>
           </p14:sldIdLst>
         </p14:section>
-        <p14:section name="First-line, salvage and CAR-T" id="{d86cfa4c-61a6-0049-f2c6-c1d7c42a2e0a}">
+        <p14:section name="First-line, salvage and CAR-T" id="{0ecba1f4-38fd-6746-3f56-5bfacda45785}">
           <p14:sldIdLst>
             <p14:sldId id="261"/>
             <p14:sldId id="262"/>
@@ -156,7 +156,7 @@
             <p14:sldId id="265"/>
           </p14:sldIdLst>
         </p14:section>
-        <p14:section name="Transplant technique and outcome" id="{53592094-4f21-9262-f175-0c313d41f9c4}">
+        <p14:section name="Transplant technique and outcome" id="{79990e2a-5d0b-0dd4-8ec6-80e982a26442}">
           <p14:sldIdLst>
             <p14:sldId id="266"/>
             <p14:sldId id="267"/>
@@ -165,7 +165,7 @@
             <p14:sldId id="270"/>
           </p14:sldIdLst>
         </p14:section>
-        <p14:section name="Children and questions" id="{ba8da18e-e519-4316-5f4d-5137860aa61d}">
+        <p14:section name="Children and questions" id="{039b8b71-f784-009a-e703-f948ad1a55f1}">
           <p14:sldIdLst>
             <p14:sldId id="271"/>
             <p14:sldId id="272"/>
@@ -176,14 +176,14 @@
             <p14:sldId id="277"/>
           </p14:sldIdLst>
         </p14:section>
-        <p14:section name="References" id="{b3449cae-62e0-5025-781e-bbc45ab4fb02}">
+        <p14:section name="References" id="{54c530b5-6bf1-056d-5f6a-099124ee37b4}">
           <p14:sldIdLst>
             <p14:sldId id="278"/>
             <p14:sldId id="279"/>
             <p14:sldId id="280"/>
           </p14:sldIdLst>
         </p14:section>
-        <p14:section name="Backup" id="{e04ca972-1e66-a4c8-7623-d0a93a8f5135}">
+        <p14:section name="Backup" id="{a78c1d58-3a0e-2daf-4c26-7827d4f75057}">
           <p14:sldIdLst>
             <p14:sldId id="281"/>
             <p14:sldId id="282"/>
@@ -5557,7 +5557,7 @@
       </p:sp>
       <p:sp>
         <p:nvSpPr>
-          <p:cNvPr id="6" name="Box 36"/>
+          <p:cNvPr id="6" name="Box 35"/>
           <p:cNvSpPr txBox="1"/>
           <p:nvPr/>
         </p:nvSpPr>
@@ -5669,7 +5669,7 @@
       </p:sp>
       <p:sp>
         <p:nvSpPr>
-          <p:cNvPr id="10" name="Text 37"/>
+          <p:cNvPr id="10" name="Text 36"/>
           <p:cNvSpPr txBox="1"/>
           <p:nvPr/>
         </p:nvSpPr>
@@ -5707,7 +5707,7 @@
       </p:sp>
       <p:sp>
         <p:nvSpPr>
-          <p:cNvPr id="11" name="Box 38"/>
+          <p:cNvPr id="11" name="Box 37"/>
           <p:cNvSpPr txBox="1"/>
           <p:nvPr/>
         </p:nvSpPr>
@@ -5773,7 +5773,7 @@
       </p:sp>
       <p:sp>
         <p:nvSpPr>
-          <p:cNvPr id="13" name="Box 39"/>
+          <p:cNvPr id="13" name="Box 38"/>
           <p:cNvSpPr txBox="1"/>
           <p:nvPr/>
         </p:nvSpPr>
@@ -5839,7 +5839,7 @@
       </p:sp>
       <p:sp>
         <p:nvSpPr>
-          <p:cNvPr id="15" name="Text 40"/>
+          <p:cNvPr id="15" name="Text 39"/>
           <p:cNvSpPr txBox="1"/>
           <p:nvPr/>
         </p:nvSpPr>
@@ -5877,7 +5877,7 @@
       </p:sp>
       <p:sp>
         <p:nvSpPr>
-          <p:cNvPr id="16" name="Box 41"/>
+          <p:cNvPr id="16" name="Box 40"/>
           <p:cNvSpPr txBox="1"/>
           <p:nvPr/>
         </p:nvSpPr>
@@ -5943,7 +5943,7 @@
       </p:sp>
       <p:sp>
         <p:nvSpPr>
-          <p:cNvPr id="18" name="Box 42"/>
+          <p:cNvPr id="18" name="Box 41"/>
           <p:cNvSpPr txBox="1"/>
           <p:nvPr/>
         </p:nvSpPr>
@@ -6009,7 +6009,7 @@
       </p:sp>
       <p:sp>
         <p:nvSpPr>
-          <p:cNvPr id="20" name="Text 43"/>
+          <p:cNvPr id="20" name="Text 42"/>
           <p:cNvSpPr txBox="1"/>
           <p:nvPr/>
         </p:nvSpPr>
@@ -6047,7 +6047,7 @@
       </p:sp>
       <p:sp>
         <p:nvSpPr>
-          <p:cNvPr id="21" name="Box 44"/>
+          <p:cNvPr id="21" name="Box 43"/>
           <p:cNvSpPr txBox="1"/>
           <p:nvPr/>
         </p:nvSpPr>
@@ -6113,7 +6113,7 @@
       </p:sp>
       <p:sp>
         <p:nvSpPr>
-          <p:cNvPr id="23" name="Box 45"/>
+          <p:cNvPr id="23" name="Box 44"/>
           <p:cNvSpPr txBox="1"/>
           <p:nvPr/>
         </p:nvSpPr>
@@ -6339,7 +6339,7 @@
       </p:sp>
       <p:graphicFrame>
         <p:nvGraphicFramePr>
-          <p:cNvPr id="12" name="Table 46"/>
+          <p:cNvPr id="12" name="Table 45"/>
           <p:cNvGraphicFramePr>
             <a:graphicFrameLocks noGrp="1"/>
           </p:cNvGraphicFramePr>
@@ -6873,7 +6873,7 @@
       </p:graphicFrame>
       <p:sp>
         <p:nvSpPr>
-          <p:cNvPr id="7" name="Text 47"/>
+          <p:cNvPr id="7" name="Text 46"/>
           <p:cNvSpPr txBox="1"/>
           <p:nvPr/>
         </p:nvSpPr>
@@ -7093,7 +7093,7 @@
       </p:sp>
       <p:graphicFrame>
         <p:nvGraphicFramePr>
-          <p:cNvPr id="13" name="Table 48"/>
+          <p:cNvPr id="13" name="Table 47"/>
           <p:cNvGraphicFramePr>
             <a:graphicFrameLocks noGrp="1"/>
           </p:cNvGraphicFramePr>
@@ -7874,7 +7874,7 @@
       </p:graphicFrame>
       <p:sp>
         <p:nvSpPr>
-          <p:cNvPr id="7" name="Text 49"/>
+          <p:cNvPr id="7" name="Text 48"/>
           <p:cNvSpPr txBox="1"/>
           <p:nvPr/>
         </p:nvSpPr>
@@ -8094,7 +8094,7 @@
       </p:sp>
       <p:graphicFrame>
         <p:nvGraphicFramePr>
-          <p:cNvPr id="14" name="Table 50"/>
+          <p:cNvPr id="14" name="Table 49"/>
           <p:cNvGraphicFramePr>
             <a:graphicFrameLocks noGrp="1"/>
           </p:cNvGraphicFramePr>
@@ -8976,7 +8976,7 @@
       </p:sp>
       <p:sp>
         <p:nvSpPr>
-          <p:cNvPr id="6" name="Box 51"/>
+          <p:cNvPr id="6" name="Box 50"/>
           <p:cNvSpPr txBox="1"/>
           <p:nvPr/>
         </p:nvSpPr>
@@ -9088,7 +9088,7 @@
       </p:sp>
       <p:sp>
         <p:nvSpPr>
-          <p:cNvPr id="10" name="Text 52"/>
+          <p:cNvPr id="10" name="Text 51"/>
           <p:cNvSpPr txBox="1"/>
           <p:nvPr/>
         </p:nvSpPr>
@@ -9126,7 +9126,7 @@
       </p:sp>
       <p:sp>
         <p:nvSpPr>
-          <p:cNvPr id="11" name="Box 53"/>
+          <p:cNvPr id="11" name="Box 52"/>
           <p:cNvSpPr txBox="1"/>
           <p:nvPr/>
         </p:nvSpPr>
@@ -9192,7 +9192,7 @@
       </p:sp>
       <p:sp>
         <p:nvSpPr>
-          <p:cNvPr id="13" name="Box 54"/>
+          <p:cNvPr id="13" name="Box 53"/>
           <p:cNvSpPr txBox="1"/>
           <p:nvPr/>
         </p:nvSpPr>
@@ -9258,7 +9258,7 @@
       </p:sp>
       <p:sp>
         <p:nvSpPr>
-          <p:cNvPr id="15" name="Text 55"/>
+          <p:cNvPr id="15" name="Text 54"/>
           <p:cNvSpPr txBox="1"/>
           <p:nvPr/>
         </p:nvSpPr>
@@ -9296,7 +9296,7 @@
       </p:sp>
       <p:sp>
         <p:nvSpPr>
-          <p:cNvPr id="16" name="Box 56"/>
+          <p:cNvPr id="16" name="Box 55"/>
           <p:cNvSpPr txBox="1"/>
           <p:nvPr/>
         </p:nvSpPr>
@@ -9362,7 +9362,7 @@
       </p:sp>
       <p:sp>
         <p:nvSpPr>
-          <p:cNvPr id="18" name="Box 57"/>
+          <p:cNvPr id="18" name="Box 56"/>
           <p:cNvSpPr txBox="1"/>
           <p:nvPr/>
         </p:nvSpPr>
@@ -9428,7 +9428,7 @@
       </p:sp>
       <p:sp>
         <p:nvSpPr>
-          <p:cNvPr id="20" name="Text 58"/>
+          <p:cNvPr id="20" name="Text 57"/>
           <p:cNvSpPr txBox="1"/>
           <p:nvPr/>
         </p:nvSpPr>
@@ -9466,7 +9466,7 @@
       </p:sp>
       <p:sp>
         <p:nvSpPr>
-          <p:cNvPr id="21" name="Box 59"/>
+          <p:cNvPr id="21" name="Box 58"/>
           <p:cNvSpPr txBox="1"/>
           <p:nvPr/>
         </p:nvSpPr>
@@ -9532,7 +9532,7 @@
       </p:sp>
       <p:sp>
         <p:nvSpPr>
-          <p:cNvPr id="23" name="Box 60"/>
+          <p:cNvPr id="23" name="Box 59"/>
           <p:cNvSpPr txBox="1"/>
           <p:nvPr/>
         </p:nvSpPr>
@@ -9758,7 +9758,7 @@
       </p:sp>
       <p:graphicFrame>
         <p:nvGraphicFramePr>
-          <p:cNvPr id="16" name="Table 61"/>
+          <p:cNvPr id="16" name="Table 60"/>
           <p:cNvGraphicFramePr>
             <a:graphicFrameLocks noGrp="1"/>
           </p:cNvGraphicFramePr>
@@ -11033,7 +11033,7 @@
       </p:graphicFrame>
       <p:sp>
         <p:nvSpPr>
-          <p:cNvPr id="7" name="Text 62"/>
+          <p:cNvPr id="7" name="Text 61"/>
           <p:cNvSpPr txBox="1"/>
           <p:nvPr/>
         </p:nvSpPr>
@@ -11253,7 +11253,7 @@
       </p:sp>
       <p:graphicFrame>
         <p:nvGraphicFramePr>
-          <p:cNvPr id="17" name="Table 63"/>
+          <p:cNvPr id="17" name="Table 62"/>
           <p:cNvGraphicFramePr>
             <a:graphicFrameLocks noGrp="1"/>
           </p:cNvGraphicFramePr>
@@ -11274,9 +11274,9 @@
             <a:tbl>
               <a:tblPr/>
               <a:tblGrid>
-                <a:gridCol w="2386584"/>
-                <a:gridCol w="3849624"/>
-                <a:gridCol w="4581144"/>
+                <a:gridCol w="2203704"/>
+                <a:gridCol w="3575304"/>
+                <a:gridCol w="5038344"/>
               </a:tblGrid>
               <a:tr h="0">
                 <a:tc>
@@ -12156,13 +12156,13 @@
       </p:graphicFrame>
       <p:sp>
         <p:nvSpPr>
-          <p:cNvPr id="7" name="Text 64"/>
+          <p:cNvPr id="7" name="Text 63"/>
           <p:cNvSpPr txBox="1"/>
           <p:nvPr/>
         </p:nvSpPr>
         <p:spPr>
           <a:xfrm>
-            <a:off x="685800" y="5166360"/>
+            <a:off x="685800" y="5349240"/>
             <a:ext cx="10817352" cy="411480"/>
           </a:xfrm>
           <a:prstGeom prst="rect">
@@ -12184,7 +12184,7 @@
                   <a:schemeClr val="tx1"/>
                 </a:solidFill>
               </a:rPr>
-              <a:t>FORUM (Peters 2021): TBI/VP16 gave about 20% better OS and EFS and lower NRM than chemo-conditioning above age 4.</a:t>
+              <a:t>FORUM (Peters 2021): TBI/VP16 gave ~20% better OS and EFS, lower NRM than chemo above age 4.</a:t>
             </a:r>
             <a:endParaRPr lang="en-US" sz="1600" dirty="0"/>
           </a:p>
@@ -12376,7 +12376,7 @@
       </p:sp>
       <p:sp>
         <p:nvSpPr>
-          <p:cNvPr id="6" name="Text 65"/>
+          <p:cNvPr id="6" name="Text 64"/>
           <p:cNvSpPr txBox="1"/>
           <p:nvPr/>
         </p:nvSpPr>
@@ -12412,7 +12412,7 @@
       </p:sp>
       <p:sp>
         <p:nvSpPr>
-          <p:cNvPr id="7" name="Text 66"/>
+          <p:cNvPr id="7" name="Text 65"/>
           <p:cNvSpPr txBox="1"/>
           <p:nvPr/>
         </p:nvSpPr>
@@ -12703,7 +12703,7 @@
       </p:sp>
       <p:sp>
         <p:nvSpPr>
-          <p:cNvPr id="6" name="Box 67"/>
+          <p:cNvPr id="6" name="Box 66"/>
           <p:cNvSpPr txBox="1"/>
           <p:nvPr/>
         </p:nvSpPr>
@@ -12745,7 +12745,7 @@
       </p:sp>
       <p:sp>
         <p:nvSpPr>
-          <p:cNvPr id="7" name="Text 68"/>
+          <p:cNvPr id="7" name="Text 67"/>
           <p:cNvSpPr txBox="1"/>
           <p:nvPr/>
         </p:nvSpPr>
@@ -12965,7 +12965,7 @@
       </p:sp>
       <p:sp>
         <p:nvSpPr>
-          <p:cNvPr id="6" name="Text 69"/>
+          <p:cNvPr id="6" name="Text 68"/>
           <p:cNvSpPr txBox="1"/>
           <p:nvPr/>
         </p:nvSpPr>
@@ -13001,7 +13001,7 @@
       </p:sp>
       <p:sp>
         <p:nvSpPr>
-          <p:cNvPr id="7" name="Text 70"/>
+          <p:cNvPr id="7" name="Text 69"/>
           <p:cNvSpPr txBox="1"/>
           <p:nvPr/>
         </p:nvSpPr>
@@ -14133,7 +14133,7 @@
       </p:sp>
       <p:sp>
         <p:nvSpPr>
-          <p:cNvPr id="6" name="Box 71"/>
+          <p:cNvPr id="6" name="Box 70"/>
           <p:cNvSpPr txBox="1"/>
           <p:nvPr/>
         </p:nvSpPr>
@@ -14175,7 +14175,7 @@
       </p:sp>
       <p:sp>
         <p:nvSpPr>
-          <p:cNvPr id="7" name="Text 72"/>
+          <p:cNvPr id="7" name="Text 71"/>
           <p:cNvSpPr txBox="1"/>
           <p:nvPr/>
         </p:nvSpPr>
@@ -14395,7 +14395,7 @@
       </p:sp>
       <p:sp>
         <p:nvSpPr>
-          <p:cNvPr id="6" name="Text 73"/>
+          <p:cNvPr id="6" name="Text 72"/>
           <p:cNvSpPr txBox="1"/>
           <p:nvPr/>
         </p:nvSpPr>
@@ -14431,7 +14431,7 @@
       </p:sp>
       <p:sp>
         <p:nvSpPr>
-          <p:cNvPr id="7" name="Text 74"/>
+          <p:cNvPr id="7" name="Text 73"/>
           <p:cNvSpPr txBox="1"/>
           <p:nvPr/>
         </p:nvSpPr>
@@ -14722,7 +14722,7 @@
       </p:sp>
       <p:sp>
         <p:nvSpPr>
-          <p:cNvPr id="6" name="Box 75"/>
+          <p:cNvPr id="6" name="Box 74"/>
           <p:cNvSpPr txBox="1"/>
           <p:nvPr/>
         </p:nvSpPr>
@@ -14764,7 +14764,7 @@
       </p:sp>
       <p:sp>
         <p:nvSpPr>
-          <p:cNvPr id="7" name="Text 76"/>
+          <p:cNvPr id="7" name="Text 75"/>
           <p:cNvSpPr txBox="1"/>
           <p:nvPr/>
         </p:nvSpPr>
@@ -14946,7 +14946,7 @@
       </p:sp>
       <p:sp>
         <p:nvSpPr>
-          <p:cNvPr id="5" name="Text 77"/>
+          <p:cNvPr id="5" name="Text 76"/>
           <p:cNvSpPr txBox="1"/>
           <p:nvPr/>
         </p:nvSpPr>
@@ -15019,7 +15019,7 @@
       </p:sp>
       <p:sp>
         <p:nvSpPr>
-          <p:cNvPr id="6" name="Text 78"/>
+          <p:cNvPr id="6" name="Text 77"/>
           <p:cNvSpPr txBox="1"/>
           <p:nvPr/>
         </p:nvSpPr>
@@ -15268,7 +15268,7 @@
       </p:sp>
       <p:sp>
         <p:nvSpPr>
-          <p:cNvPr id="5" name="Text 79"/>
+          <p:cNvPr id="5" name="Text 78"/>
           <p:cNvSpPr txBox="1"/>
           <p:nvPr/>
         </p:nvSpPr>
@@ -15341,7 +15341,7 @@
       </p:sp>
       <p:sp>
         <p:nvSpPr>
-          <p:cNvPr id="6" name="Text 80"/>
+          <p:cNvPr id="6" name="Text 79"/>
           <p:cNvSpPr txBox="1"/>
           <p:nvPr/>
         </p:nvSpPr>
@@ -15590,7 +15590,7 @@
       </p:sp>
       <p:sp>
         <p:nvSpPr>
-          <p:cNvPr id="5" name="Text 81"/>
+          <p:cNvPr id="5" name="Text 80"/>
           <p:cNvSpPr txBox="1"/>
           <p:nvPr/>
         </p:nvSpPr>
@@ -15663,7 +15663,7 @@
       </p:sp>
       <p:sp>
         <p:nvSpPr>
-          <p:cNvPr id="6" name="Text 82"/>
+          <p:cNvPr id="6" name="Text 81"/>
           <p:cNvSpPr txBox="1"/>
           <p:nvPr/>
         </p:nvSpPr>
@@ -15849,7 +15849,7 @@
                   <a:schemeClr val="tx1"/>
                 </a:solidFill>
               </a:rPr>
-              <a:t>BACKUP · BACKUP · PAEDIATRIC CR1 (TABLE 73.1)</a:t>
+              <a:t>BACKUP · PAEDIATRIC CR1 (TABLE 73.1)</a:t>
             </a:r>
             <a:endParaRPr lang="en-US" sz="1100" dirty="0"/>
           </a:p>
@@ -15933,7 +15933,7 @@
       </p:sp>
       <p:graphicFrame>
         <p:nvGraphicFramePr>
-          <p:cNvPr id="27" name="Table 83"/>
+          <p:cNvPr id="27" name="Table 82"/>
           <p:cNvGraphicFramePr>
             <a:graphicFrameLocks noGrp="1"/>
           </p:cNvGraphicFramePr>
@@ -17208,7 +17208,7 @@
       </p:graphicFrame>
       <p:sp>
         <p:nvSpPr>
-          <p:cNvPr id="7" name="Text 84"/>
+          <p:cNvPr id="7" name="Text 83"/>
           <p:cNvSpPr txBox="1"/>
           <p:nvPr/>
         </p:nvSpPr>
@@ -17344,7 +17344,7 @@
                   <a:schemeClr val="tx1"/>
                 </a:solidFill>
               </a:rPr>
-              <a:t>BACKUP · BACKUP · PAEDIATRIC RELAPSE</a:t>
+              <a:t>BACKUP · PAEDIATRIC RELAPSE</a:t>
             </a:r>
             <a:endParaRPr lang="en-US" sz="1100" dirty="0"/>
           </a:p>
@@ -17428,7 +17428,7 @@
       </p:sp>
       <p:graphicFrame>
         <p:nvGraphicFramePr>
-          <p:cNvPr id="28" name="Table 85"/>
+          <p:cNvPr id="28" name="Table 84"/>
           <p:cNvGraphicFramePr>
             <a:graphicFrameLocks noGrp="1"/>
           </p:cNvGraphicFramePr>
@@ -18431,7 +18431,7 @@
                   <a:schemeClr val="tx1"/>
                 </a:solidFill>
               </a:rPr>
-              <a:t>BACKUP · BACKUP · AUTO-HCT</a:t>
+              <a:t>BACKUP · AUTO-HCT</a:t>
             </a:r>
             <a:endParaRPr lang="en-US" sz="1100" dirty="0"/>
           </a:p>
@@ -18515,7 +18515,7 @@
       </p:sp>
       <p:sp>
         <p:nvSpPr>
-          <p:cNvPr id="6" name="Text 86"/>
+          <p:cNvPr id="6" name="Text 85"/>
           <p:cNvSpPr txBox="1"/>
           <p:nvPr/>
         </p:nvSpPr>
@@ -18585,7 +18585,7 @@
       </p:sp>
       <p:sp>
         <p:nvSpPr>
-          <p:cNvPr id="7" name="Text 87"/>
+          <p:cNvPr id="7" name="Text 86"/>
           <p:cNvSpPr txBox="1"/>
           <p:nvPr/>
         </p:nvSpPr>
@@ -18655,7 +18655,7 @@
       </p:sp>
       <p:sp>
         <p:nvSpPr>
-          <p:cNvPr id="8" name="Text 88"/>
+          <p:cNvPr id="8" name="Text 87"/>
           <p:cNvSpPr txBox="1"/>
           <p:nvPr/>
         </p:nvSpPr>
@@ -21557,49 +21557,13 @@
         <p:spPr>
           <a:xfrm>
             <a:off x="685800" y="2148840"/>
-            <a:ext cx="6706758" cy="2702723"/>
+            <a:ext cx="9189720" cy="3703320"/>
           </a:xfrm>
           <a:prstGeom prst="rect">
             <a:avLst/>
           </a:prstGeom>
         </p:spPr>
       </p:pic>
-      <p:sp>
-        <p:nvSpPr>
-          <p:cNvPr id="7" name="Text 27"/>
-          <p:cNvSpPr txBox="1"/>
-          <p:nvPr/>
-        </p:nvSpPr>
-        <p:spPr>
-          <a:xfrm>
-            <a:off x="7825252" y="2240280"/>
-            <a:ext cx="3677900" cy="3657600"/>
-          </a:xfrm>
-          <a:prstGeom prst="rect">
-            <a:avLst/>
-          </a:prstGeom>
-          <a:noFill/>
-          <a:ln/>
-        </p:spPr>
-        <p:txBody>
-          <a:bodyPr wrap="square" lIns="0" tIns="0" rIns="0" bIns="0" rtlCol="0" anchor="t"/>
-          <a:lstStyle/>
-          <a:p>
-            <a:pPr indent="0" marL="0">
-              <a:buNone/>
-            </a:pPr>
-            <a:r>
-              <a:rPr lang="en-US" sz="1600" dirty="0">
-                <a:solidFill>
-                  <a:schemeClr val="tx1"/>
-                </a:solidFill>
-              </a:rPr>
-              <a:t>Ph−: induction and consolidation ± rituximab; MRD ≥ 10⁻³ leads to blinatumomab; high risk goes to allo-HCT, standard risk to maintenance. Ph+: imatinib ± low-dose chemotherapy, allo-HCT, then TKI maintenance (Fig. 72.1).</a:t>
-            </a:r>
-            <a:endParaRPr lang="en-US" sz="1600" dirty="0"/>
-          </a:p>
-        </p:txBody>
-      </p:sp>
       <p:sp>
         <p:nvSpPr>
           <p:cNvPr id="25" name="Slide Number Placeholder 0"/>
@@ -21786,7 +21750,7 @@
       </p:sp>
       <p:graphicFrame>
         <p:nvGraphicFramePr>
-          <p:cNvPr id="8" name="Table 28"/>
+          <p:cNvPr id="8" name="Table 27"/>
           <p:cNvGraphicFramePr>
             <a:graphicFrameLocks noGrp="1"/>
           </p:cNvGraphicFramePr>
@@ -22873,7 +22837,7 @@
       </p:sp>
       <p:graphicFrame>
         <p:nvGraphicFramePr>
-          <p:cNvPr id="9" name="Table 29"/>
+          <p:cNvPr id="9" name="Table 28"/>
           <p:cNvGraphicFramePr>
             <a:graphicFrameLocks noGrp="1"/>
           </p:cNvGraphicFramePr>
@@ -23898,7 +23862,7 @@
       </p:graphicFrame>
       <p:sp>
         <p:nvSpPr>
-          <p:cNvPr id="7" name="Text 30"/>
+          <p:cNvPr id="7" name="Text 29"/>
           <p:cNvSpPr txBox="1"/>
           <p:nvPr/>
         </p:nvSpPr>
@@ -24118,7 +24082,7 @@
       </p:sp>
       <p:sp>
         <p:nvSpPr>
-          <p:cNvPr id="6" name="Box 31"/>
+          <p:cNvPr id="6" name="Box 30"/>
           <p:cNvSpPr txBox="1"/>
           <p:nvPr/>
         </p:nvSpPr>
@@ -24184,7 +24148,7 @@
       </p:sp>
       <p:sp>
         <p:nvSpPr>
-          <p:cNvPr id="8" name="Box 32"/>
+          <p:cNvPr id="8" name="Box 31"/>
           <p:cNvSpPr txBox="1"/>
           <p:nvPr/>
         </p:nvSpPr>
@@ -24250,7 +24214,7 @@
       </p:sp>
       <p:sp>
         <p:nvSpPr>
-          <p:cNvPr id="10" name="Box 33"/>
+          <p:cNvPr id="10" name="Box 32"/>
           <p:cNvSpPr txBox="1"/>
           <p:nvPr/>
         </p:nvSpPr>
@@ -24316,7 +24280,7 @@
       </p:sp>
       <p:sp>
         <p:nvSpPr>
-          <p:cNvPr id="12" name="Box 34"/>
+          <p:cNvPr id="12" name="Box 33"/>
           <p:cNvSpPr txBox="1"/>
           <p:nvPr/>
         </p:nvSpPr>
@@ -24358,7 +24322,7 @@
       </p:sp>
       <p:sp>
         <p:nvSpPr>
-          <p:cNvPr id="13" name="Text 35"/>
+          <p:cNvPr id="13" name="Text 34"/>
           <p:cNvSpPr txBox="1"/>
           <p:nvPr/>
         </p:nvSpPr>

--- a/slides/decks/s22-all.pptx
+++ b/slides/decks/s22-all.pptx
@@ -134,20 +134,20 @@
   <p:extLst>
     <p:ext uri="{521415D9-36F7-43E2-AB2F-B90AF26B5E84}">
       <p14:sectionLst xmlns:p14="http://schemas.microsoft.com/office/powerpoint/2010/main">
-        <p14:section name="Opening" id="{777103c9-53b5-fc68-59e9-ed51a326c0ae}">
+        <p14:section name="Opening" id="{77789e2f-9ec6-494a-cacf-8ab89a7684ae}">
           <p14:sldIdLst>
             <p14:sldId id="256"/>
             <p14:sldId id="257"/>
           </p14:sldIdLst>
         </p14:section>
-        <p14:section name="Risk and the CR1 decision" id="{efab703b-b476-0e4a-d505-009e0af23f3c}">
+        <p14:section name="Risk and the CR1 decision" id="{ae7e5ea3-537d-a9ea-ed68-db86a86b0a7b}">
           <p14:sldIdLst>
             <p14:sldId id="258"/>
             <p14:sldId id="259"/>
             <p14:sldId id="260"/>
           </p14:sldIdLst>
         </p14:section>
-        <p14:section name="First-line, salvage and CAR-T" id="{0ecba1f4-38fd-6746-3f56-5bfacda45785}">
+        <p14:section name="First-line, salvage and CAR-T" id="{4c7d5347-9233-329a-7700-f005c55ed5a3}">
           <p14:sldIdLst>
             <p14:sldId id="261"/>
             <p14:sldId id="262"/>
@@ -156,7 +156,7 @@
             <p14:sldId id="265"/>
           </p14:sldIdLst>
         </p14:section>
-        <p14:section name="Transplant technique and outcome" id="{79990e2a-5d0b-0dd4-8ec6-80e982a26442}">
+        <p14:section name="Transplant technique and outcome" id="{0bd9369b-0687-3a03-421e-0192c0082263}">
           <p14:sldIdLst>
             <p14:sldId id="266"/>
             <p14:sldId id="267"/>
@@ -165,7 +165,7 @@
             <p14:sldId id="270"/>
           </p14:sldIdLst>
         </p14:section>
-        <p14:section name="Children and questions" id="{039b8b71-f784-009a-e703-f948ad1a55f1}">
+        <p14:section name="Children and questions" id="{df07e934-876d-7c4d-9bdf-ef596cd8e1ed}">
           <p14:sldIdLst>
             <p14:sldId id="271"/>
             <p14:sldId id="272"/>
@@ -176,14 +176,14 @@
             <p14:sldId id="277"/>
           </p14:sldIdLst>
         </p14:section>
-        <p14:section name="References" id="{54c530b5-6bf1-056d-5f6a-099124ee37b4}">
+        <p14:section name="References" id="{f6ec2c53-577c-88cd-d252-c0b5ee8d24cd}">
           <p14:sldIdLst>
             <p14:sldId id="278"/>
             <p14:sldId id="279"/>
             <p14:sldId id="280"/>
           </p14:sldIdLst>
         </p14:section>
-        <p14:section name="Backup" id="{a78c1d58-3a0e-2daf-4c26-7827d4f75057}">
+        <p14:section name="Backup" id="{76052e77-5b9b-d501-d21f-e80f46cfa3d0}">
           <p14:sldIdLst>
             <p14:sldId id="281"/>
             <p14:sldId id="282"/>
@@ -12162,7 +12162,7 @@
         </p:nvSpPr>
         <p:spPr>
           <a:xfrm>
-            <a:off x="685800" y="5349240"/>
+            <a:off x="685800" y="4800600"/>
             <a:ext cx="10817352" cy="411480"/>
           </a:xfrm>
           <a:prstGeom prst="rect">

--- a/slides/decks/s22-all.pptx
+++ b/slides/decks/s22-all.pptx
@@ -134,20 +134,20 @@
   <p:extLst>
     <p:ext uri="{521415D9-36F7-43E2-AB2F-B90AF26B5E84}">
       <p14:sectionLst xmlns:p14="http://schemas.microsoft.com/office/powerpoint/2010/main">
-        <p14:section name="Opening" id="{77789e2f-9ec6-494a-cacf-8ab89a7684ae}">
+        <p14:section name="Opening" id="{c4f11ad5-a9f4-c0da-d124-75ed9f4d3b6e}">
           <p14:sldIdLst>
             <p14:sldId id="256"/>
             <p14:sldId id="257"/>
           </p14:sldIdLst>
         </p14:section>
-        <p14:section name="Risk and the CR1 decision" id="{ae7e5ea3-537d-a9ea-ed68-db86a86b0a7b}">
+        <p14:section name="Risk and the CR1 decision" id="{1d68b4f7-83b9-3ffc-b95f-1181802e6ea3}">
           <p14:sldIdLst>
             <p14:sldId id="258"/>
             <p14:sldId id="259"/>
             <p14:sldId id="260"/>
           </p14:sldIdLst>
         </p14:section>
-        <p14:section name="First-line, salvage and CAR-T" id="{4c7d5347-9233-329a-7700-f005c55ed5a3}">
+        <p14:section name="First-line, salvage and CAR-T" id="{3003edf5-a26c-7d05-03e7-fd0560774b01}">
           <p14:sldIdLst>
             <p14:sldId id="261"/>
             <p14:sldId id="262"/>
@@ -156,7 +156,7 @@
             <p14:sldId id="265"/>
           </p14:sldIdLst>
         </p14:section>
-        <p14:section name="Transplant technique and outcome" id="{0bd9369b-0687-3a03-421e-0192c0082263}">
+        <p14:section name="Transplant technique and outcome" id="{88c9548c-5bf6-6aa0-a5b7-aae2ffe70705}">
           <p14:sldIdLst>
             <p14:sldId id="266"/>
             <p14:sldId id="267"/>
@@ -165,7 +165,7 @@
             <p14:sldId id="270"/>
           </p14:sldIdLst>
         </p14:section>
-        <p14:section name="Children and questions" id="{df07e934-876d-7c4d-9bdf-ef596cd8e1ed}">
+        <p14:section name="Children and questions" id="{91dab531-eac5-4646-a42f-372b8bfa8ec2}">
           <p14:sldIdLst>
             <p14:sldId id="271"/>
             <p14:sldId id="272"/>
@@ -176,14 +176,14 @@
             <p14:sldId id="277"/>
           </p14:sldIdLst>
         </p14:section>
-        <p14:section name="References" id="{f6ec2c53-577c-88cd-d252-c0b5ee8d24cd}">
+        <p14:section name="References" id="{a24b8710-35b5-65c5-6323-8431eba4248e}">
           <p14:sldIdLst>
             <p14:sldId id="278"/>
             <p14:sldId id="279"/>
             <p14:sldId id="280"/>
           </p14:sldIdLst>
         </p14:section>
-        <p14:section name="Backup" id="{76052e77-5b9b-d501-d21f-e80f46cfa3d0}">
+        <p14:section name="Backup" id="{34739ecb-9063-642a-5c56-992d507e4665}">
           <p14:sldIdLst>
             <p14:sldId id="281"/>
             <p14:sldId id="282"/>
